--- a/Documentation/Levski (1).pptx
+++ b/Documentation/Levski (1).pptx
@@ -245,7 +245,7 @@
           <a:p>
             <a:fld id="{FA2C14BC-9E0B-417D-A4B6-D3A52302FEC1}" type="datetimeFigureOut">
               <a:rPr lang="en-US" smtClean="0"/>
-              <a:t>3/24/2026</a:t>
+              <a:t>3/25/2026</a:t>
             </a:fld>
             <a:endParaRPr lang="en-US"/>
           </a:p>
@@ -438,7 +438,7 @@
           <a:p>
             <a:fld id="{5C7FB986-3F20-4AE6-9D44-118BB6C2AE02}" type="datetimeFigureOut">
               <a:rPr lang="en-US" smtClean="0"/>
-              <a:t>3/24/2026</a:t>
+              <a:t>3/25/2026</a:t>
             </a:fld>
             <a:endParaRPr lang="en-US"/>
           </a:p>
@@ -705,6 +705,90 @@
 </p:notesMaster>
 </file>
 
+<file path=ppt/notesSlides/notesSlide1.xml><?xml version="1.0" encoding="utf-8"?>
+<p:notes xmlns:a="http://schemas.openxmlformats.org/drawingml/2006/main" xmlns:r="http://schemas.openxmlformats.org/officeDocument/2006/relationships" xmlns:p="http://schemas.openxmlformats.org/presentationml/2006/main">
+  <p:cSld>
+    <p:spTree>
+      <p:nvGrpSpPr>
+        <p:cNvPr id="1" name=""/>
+        <p:cNvGrpSpPr/>
+        <p:nvPr/>
+      </p:nvGrpSpPr>
+      <p:grpSpPr>
+        <a:xfrm>
+          <a:off x="0" y="0"/>
+          <a:ext cx="0" cy="0"/>
+          <a:chOff x="0" y="0"/>
+          <a:chExt cx="0" cy="0"/>
+        </a:xfrm>
+      </p:grpSpPr>
+      <p:sp>
+        <p:nvSpPr>
+          <p:cNvPr id="2" name="Slide Image Placeholder 1"/>
+          <p:cNvSpPr>
+            <a:spLocks noGrp="1" noRot="1" noChangeAspect="1"/>
+          </p:cNvSpPr>
+          <p:nvPr>
+            <p:ph type="sldImg"/>
+          </p:nvPr>
+        </p:nvSpPr>
+        <p:spPr/>
+      </p:sp>
+      <p:sp>
+        <p:nvSpPr>
+          <p:cNvPr id="3" name="Notes Placeholder 2"/>
+          <p:cNvSpPr>
+            <a:spLocks noGrp="1"/>
+          </p:cNvSpPr>
+          <p:nvPr>
+            <p:ph type="body" idx="1"/>
+          </p:nvPr>
+        </p:nvSpPr>
+        <p:spPr/>
+        <p:txBody>
+          <a:bodyPr/>
+          <a:lstStyle/>
+          <a:p>
+            <a:endParaRPr lang="en-US" dirty="0"/>
+          </a:p>
+        </p:txBody>
+      </p:sp>
+      <p:sp>
+        <p:nvSpPr>
+          <p:cNvPr id="4" name="Slide Number Placeholder 3"/>
+          <p:cNvSpPr>
+            <a:spLocks noGrp="1"/>
+          </p:cNvSpPr>
+          <p:nvPr>
+            <p:ph type="sldNum" sz="quarter" idx="5"/>
+          </p:nvPr>
+        </p:nvSpPr>
+        <p:spPr/>
+        <p:txBody>
+          <a:bodyPr/>
+          <a:lstStyle/>
+          <a:p>
+            <a:fld id="{17E59575-30D1-4661-8D21-5CF1396340F1}" type="slidenum">
+              <a:rPr lang="en-US" smtClean="0"/>
+              <a:t>5</a:t>
+            </a:fld>
+            <a:endParaRPr lang="en-US"/>
+          </a:p>
+        </p:txBody>
+      </p:sp>
+    </p:spTree>
+    <p:extLst>
+      <p:ext uri="{BB962C8B-B14F-4D97-AF65-F5344CB8AC3E}">
+        <p14:creationId xmlns:p14="http://schemas.microsoft.com/office/powerpoint/2010/main" val="3648006724"/>
+      </p:ext>
+    </p:extLst>
+  </p:cSld>
+  <p:clrMapOvr>
+    <a:masterClrMapping/>
+  </p:clrMapOvr>
+</p:notes>
+</file>
+
 <file path=ppt/slideLayouts/slideLayout1.xml><?xml version="1.0" encoding="utf-8"?>
 <p:sldLayout xmlns:a="http://schemas.openxmlformats.org/drawingml/2006/main" xmlns:r="http://schemas.openxmlformats.org/officeDocument/2006/relationships" xmlns:p="http://schemas.openxmlformats.org/presentationml/2006/main" showMasterSp="0" preserve="1" userDrawn="1">
   <p:cSld name="Title with Picture">
@@ -929,7 +1013,7 @@
           <a:p>
             <a:fld id="{7DA2CEDE-2AB4-4FB8-9551-E0AA4222B1A3}" type="datetime1">
               <a:rPr lang="en-US" smtClean="0"/>
-              <a:t>3/24/2026</a:t>
+              <a:t>3/25/2026</a:t>
             </a:fld>
             <a:endParaRPr lang="en-US"/>
           </a:p>
@@ -1342,7 +1426,7 @@
           <a:p>
             <a:fld id="{7DA2CEDE-2AB4-4FB8-9551-E0AA4222B1A3}" type="datetime1">
               <a:rPr lang="en-US" smtClean="0"/>
-              <a:t>3/24/2026</a:t>
+              <a:t>3/25/2026</a:t>
             </a:fld>
             <a:endParaRPr lang="en-US"/>
           </a:p>
@@ -1814,7 +1898,7 @@
           <a:p>
             <a:fld id="{7DA2CEDE-2AB4-4FB8-9551-E0AA4222B1A3}" type="datetime1">
               <a:rPr lang="en-US" smtClean="0"/>
-              <a:t>3/24/2026</a:t>
+              <a:t>3/25/2026</a:t>
             </a:fld>
             <a:endParaRPr lang="en-US"/>
           </a:p>
@@ -2178,7 +2262,7 @@
           <a:p>
             <a:fld id="{7DA2CEDE-2AB4-4FB8-9551-E0AA4222B1A3}" type="datetime1">
               <a:rPr lang="en-US" smtClean="0"/>
-              <a:t>3/24/2026</a:t>
+              <a:t>3/25/2026</a:t>
             </a:fld>
             <a:endParaRPr lang="en-US"/>
           </a:p>
@@ -2605,7 +2689,7 @@
           <a:p>
             <a:fld id="{7DA2CEDE-2AB4-4FB8-9551-E0AA4222B1A3}" type="datetime1">
               <a:rPr lang="en-US" smtClean="0"/>
-              <a:t>3/24/2026</a:t>
+              <a:t>3/25/2026</a:t>
             </a:fld>
             <a:endParaRPr lang="en-US"/>
           </a:p>
@@ -3151,7 +3235,7 @@
           <a:p>
             <a:fld id="{C2A0816E-BD5C-478F-AB95-6BE098266DF3}" type="datetime1">
               <a:rPr lang="en-US" smtClean="0"/>
-              <a:t>3/24/2026</a:t>
+              <a:t>3/25/2026</a:t>
             </a:fld>
             <a:endParaRPr lang="en-US"/>
           </a:p>
@@ -3658,7 +3742,7 @@
           <a:p>
             <a:fld id="{75515BC3-2A9C-497B-B82C-246EEDDDF89C}" type="datetime1">
               <a:rPr lang="en-US" smtClean="0"/>
-              <a:t>3/24/2026</a:t>
+              <a:t>3/25/2026</a:t>
             </a:fld>
             <a:endParaRPr lang="en-US"/>
           </a:p>
@@ -4210,7 +4294,7 @@
           <a:p>
             <a:fld id="{5CDEAC1E-5504-4723-BE4B-1DE8B305AF62}" type="datetime1">
               <a:rPr lang="en-US" smtClean="0"/>
-              <a:t>3/24/2026</a:t>
+              <a:t>3/25/2026</a:t>
             </a:fld>
             <a:endParaRPr lang="en-US"/>
           </a:p>
@@ -4594,7 +4678,7 @@
           <a:p>
             <a:fld id="{8E6582D0-CC23-4B30-B5F7-0EC0E82226EA}" type="datetime1">
               <a:rPr lang="en-US" smtClean="0"/>
-              <a:t>3/24/2026</a:t>
+              <a:t>3/25/2026</a:t>
             </a:fld>
             <a:endParaRPr lang="en-US"/>
           </a:p>
@@ -5226,7 +5310,7 @@
           <a:p>
             <a:fld id="{7DA2CEDE-2AB4-4FB8-9551-E0AA4222B1A3}" type="datetime1">
               <a:rPr lang="en-US" smtClean="0"/>
-              <a:t>3/24/2026</a:t>
+              <a:t>3/25/2026</a:t>
             </a:fld>
             <a:endParaRPr lang="en-US"/>
           </a:p>
@@ -5466,7 +5550,7 @@
           <a:p>
             <a:fld id="{7DA2CEDE-2AB4-4FB8-9551-E0AA4222B1A3}" type="datetime1">
               <a:rPr lang="en-US" smtClean="0"/>
-              <a:t>3/24/2026</a:t>
+              <a:t>3/25/2026</a:t>
             </a:fld>
             <a:endParaRPr lang="en-US"/>
           </a:p>
@@ -5846,7 +5930,7 @@
           <a:p>
             <a:fld id="{80EE6BAA-0080-49BB-A5F6-D96B22DFE410}" type="datetime1">
               <a:rPr lang="en-US" smtClean="0"/>
-              <a:t>3/24/2026</a:t>
+              <a:t>3/25/2026</a:t>
             </a:fld>
             <a:endParaRPr lang="en-US"/>
           </a:p>
@@ -6263,7 +6347,7 @@
           <a:p>
             <a:fld id="{C3E08220-0958-4EB6-84AC-FBA5654D4035}" type="datetime1">
               <a:rPr lang="en-US" smtClean="0"/>
-              <a:t>3/24/2026</a:t>
+              <a:t>3/25/2026</a:t>
             </a:fld>
             <a:endParaRPr lang="en-US"/>
           </a:p>
@@ -6489,7 +6573,7 @@
           <a:p>
             <a:fld id="{38149B0F-FE5F-465D-BF44-EE1D3847CE00}" type="datetime1">
               <a:rPr lang="en-US" smtClean="0"/>
-              <a:t>3/24/2026</a:t>
+              <a:t>3/25/2026</a:t>
             </a:fld>
             <a:endParaRPr lang="en-US"/>
           </a:p>
@@ -6733,7 +6817,7 @@
           <a:p>
             <a:fld id="{37DA9862-2C49-41B4-AD0B-6F93BC6DDDF8}" type="datetime1">
               <a:rPr lang="en-US" smtClean="0"/>
-              <a:t>3/24/2026</a:t>
+              <a:t>3/25/2026</a:t>
             </a:fld>
             <a:endParaRPr lang="en-US"/>
           </a:p>
@@ -7112,7 +7196,7 @@
           <a:p>
             <a:fld id="{38149B0F-FE5F-465D-BF44-EE1D3847CE00}" type="datetime1">
               <a:rPr lang="en-US" smtClean="0"/>
-              <a:t>3/24/2026</a:t>
+              <a:t>3/25/2026</a:t>
             </a:fld>
             <a:endParaRPr lang="en-US"/>
           </a:p>
@@ -7351,7 +7435,7 @@
           <a:p>
             <a:fld id="{37D881E9-FF16-48A7-B8AA-A17AAAEAD6E1}" type="datetime1">
               <a:rPr lang="en-US" smtClean="0"/>
-              <a:t>3/24/2026</a:t>
+              <a:t>3/25/2026</a:t>
             </a:fld>
             <a:endParaRPr lang="en-US"/>
           </a:p>
@@ -7737,7 +7821,7 @@
           <a:p>
             <a:fld id="{52D95AE2-CFB9-4B68-957C-4721356B27A9}" type="datetime1">
               <a:rPr lang="en-US" smtClean="0"/>
-              <a:t>3/24/2026</a:t>
+              <a:t>3/25/2026</a:t>
             </a:fld>
             <a:endParaRPr lang="en-US"/>
           </a:p>
@@ -8164,7 +8248,7 @@
           <a:p>
             <a:fld id="{862C1B48-5712-40E8-928E-1136C5D12A17}" type="datetime1">
               <a:rPr lang="en-US" smtClean="0"/>
-              <a:t>3/24/2026</a:t>
+              <a:t>3/25/2026</a:t>
             </a:fld>
             <a:endParaRPr lang="en-US"/>
           </a:p>
@@ -8484,7 +8568,7 @@
           <a:p>
             <a:fld id="{2BDF39F2-6977-4B14-98E3-4DFE82804B0D}" type="datetime1">
               <a:rPr lang="en-US" smtClean="0"/>
-              <a:t>3/24/2026</a:t>
+              <a:t>3/25/2026</a:t>
             </a:fld>
             <a:endParaRPr lang="en-US"/>
           </a:p>
@@ -8899,7 +8983,7 @@
           <a:p>
             <a:fld id="{2BDF39F2-6977-4B14-98E3-4DFE82804B0D}" type="datetime1">
               <a:rPr lang="en-US" smtClean="0"/>
-              <a:t>3/24/2026</a:t>
+              <a:t>3/25/2026</a:t>
             </a:fld>
             <a:endParaRPr lang="en-US"/>
           </a:p>
@@ -9300,7 +9384,7 @@
           <a:p>
             <a:fld id="{862C1B48-5712-40E8-928E-1136C5D12A17}" type="datetime1">
               <a:rPr lang="en-US" smtClean="0"/>
-              <a:t>3/24/2026</a:t>
+              <a:t>3/25/2026</a:t>
             </a:fld>
             <a:endParaRPr lang="en-US"/>
           </a:p>
@@ -9733,7 +9817,7 @@
           <a:p>
             <a:fld id="{21560963-1EEA-4BDE-8FF9-3FEE13B5D43C}" type="datetime1">
               <a:rPr lang="en-US" smtClean="0"/>
-              <a:t>3/24/2026</a:t>
+              <a:t>3/25/2026</a:t>
             </a:fld>
             <a:endParaRPr lang="en-US"/>
           </a:p>
@@ -10050,7 +10134,7 @@
           <a:p>
             <a:fld id="{862C1B48-5712-40E8-928E-1136C5D12A17}" type="datetime1">
               <a:rPr lang="en-US" smtClean="0"/>
-              <a:t>3/24/2026</a:t>
+              <a:t>3/25/2026</a:t>
             </a:fld>
             <a:endParaRPr lang="en-US"/>
           </a:p>
@@ -10255,7 +10339,7 @@
           <a:p>
             <a:fld id="{323EC03A-74B3-46B6-A70D-0B367EABDC7F}" type="datetime1">
               <a:rPr lang="en-US" smtClean="0"/>
-              <a:t>3/24/2026</a:t>
+              <a:t>3/25/2026</a:t>
             </a:fld>
             <a:endParaRPr lang="en-US"/>
           </a:p>
@@ -10712,7 +10796,7 @@
           <a:p>
             <a:fld id="{D6F66A7C-2450-4D43-AEC7-53AFAE9E8A03}" type="datetime1">
               <a:rPr lang="en-US" smtClean="0"/>
-              <a:t>3/24/2026</a:t>
+              <a:t>3/25/2026</a:t>
             </a:fld>
             <a:endParaRPr lang="en-US"/>
           </a:p>
@@ -11209,7 +11293,7 @@
           <a:p>
             <a:fld id="{7DA2CEDE-2AB4-4FB8-9551-E0AA4222B1A3}" type="datetime1">
               <a:rPr lang="en-US" smtClean="0"/>
-              <a:t>3/24/2026</a:t>
+              <a:t>3/25/2026</a:t>
             </a:fld>
             <a:endParaRPr lang="en-US"/>
           </a:p>
@@ -11472,7 +11556,7 @@
           <a:p>
             <a:fld id="{323EC03A-74B3-46B6-A70D-0B367EABDC7F}" type="datetime1">
               <a:rPr lang="en-US" smtClean="0"/>
-              <a:t>3/24/2026</a:t>
+              <a:t>3/25/2026</a:t>
             </a:fld>
             <a:endParaRPr lang="en-US"/>
           </a:p>
@@ -11993,7 +12077,7 @@
           <a:p>
             <a:fld id="{FBC323F5-F813-45BA-B261-A7C41DB03AE5}" type="datetime1">
               <a:rPr lang="en-US" smtClean="0"/>
-              <a:t>3/24/2026</a:t>
+              <a:t>3/25/2026</a:t>
             </a:fld>
             <a:endParaRPr lang="en-US"/>
           </a:p>
@@ -12203,7 +12287,7 @@
           <a:p>
             <a:fld id="{7DA2CEDE-2AB4-4FB8-9551-E0AA4222B1A3}" type="datetime1">
               <a:rPr lang="en-US" smtClean="0"/>
-              <a:t>3/24/2026</a:t>
+              <a:t>3/25/2026</a:t>
             </a:fld>
             <a:endParaRPr lang="en-US"/>
           </a:p>
@@ -12611,7 +12695,7 @@
           <a:p>
             <a:fld id="{6D40D1C1-6E49-4083-B78C-1B50EA73104C}" type="datetime1">
               <a:rPr lang="en-US" smtClean="0"/>
-              <a:t>3/24/2026</a:t>
+              <a:t>3/25/2026</a:t>
             </a:fld>
             <a:endParaRPr lang="en-US"/>
           </a:p>
@@ -12973,7 +13057,7 @@
           <a:p>
             <a:fld id="{E74C9532-5249-4EF8-9302-9703A89C50A6}" type="datetime1">
               <a:rPr lang="en-US" smtClean="0"/>
-              <a:t>3/24/2026</a:t>
+              <a:t>3/25/2026</a:t>
             </a:fld>
             <a:endParaRPr lang="en-US"/>
           </a:p>
@@ -13245,7 +13329,7 @@
           <a:p>
             <a:fld id="{D4A97960-D10E-4C66-898F-E062784CD6C7}" type="datetime1">
               <a:rPr lang="en-US" smtClean="0"/>
-              <a:t>3/24/2026</a:t>
+              <a:t>3/25/2026</a:t>
             </a:fld>
             <a:endParaRPr lang="en-US"/>
           </a:p>
@@ -13864,7 +13948,7 @@
           <a:p>
             <a:fld id="{21560963-1EEA-4BDE-8FF9-3FEE13B5D43C}" type="datetime1">
               <a:rPr lang="en-US" smtClean="0"/>
-              <a:t>3/24/2026</a:t>
+              <a:t>3/25/2026</a:t>
             </a:fld>
             <a:endParaRPr lang="en-US"/>
           </a:p>
@@ -14044,7 +14128,7 @@
           <a:p>
             <a:fld id="{D4A97960-D10E-4C66-898F-E062784CD6C7}" type="datetime1">
               <a:rPr lang="en-US" smtClean="0"/>
-              <a:t>3/24/2026</a:t>
+              <a:t>3/25/2026</a:t>
             </a:fld>
             <a:endParaRPr lang="en-US"/>
           </a:p>
@@ -14335,7 +14419,7 @@
           <a:p>
             <a:fld id="{27B77AD4-7B4F-4A76-ADEB-9CF6601338DB}" type="datetime1">
               <a:rPr lang="en-US" smtClean="0"/>
-              <a:t>3/24/2026</a:t>
+              <a:t>3/25/2026</a:t>
             </a:fld>
             <a:endParaRPr lang="en-US"/>
           </a:p>
@@ -14601,7 +14685,7 @@
           <a:p>
             <a:fld id="{7E7D3A11-047C-4AE4-9A54-AA0426E18492}" type="datetime1">
               <a:rPr lang="en-US" smtClean="0"/>
-              <a:t>3/24/2026</a:t>
+              <a:t>3/25/2026</a:t>
             </a:fld>
             <a:endParaRPr lang="en-US"/>
           </a:p>
@@ -15195,7 +15279,7 @@
           <a:p>
             <a:fld id="{7DA2CEDE-2AB4-4FB8-9551-E0AA4222B1A3}" type="datetime1">
               <a:rPr lang="en-US" smtClean="0"/>
-              <a:t>3/24/2026</a:t>
+              <a:t>3/25/2026</a:t>
             </a:fld>
             <a:endParaRPr lang="en-US"/>
           </a:p>
@@ -15758,7 +15842,7 @@
           <a:p>
             <a:fld id="{7DA2CEDE-2AB4-4FB8-9551-E0AA4222B1A3}" type="datetime1">
               <a:rPr lang="en-US" smtClean="0"/>
-              <a:t>3/24/2026</a:t>
+              <a:t>3/25/2026</a:t>
             </a:fld>
             <a:endParaRPr lang="en-US"/>
           </a:p>
@@ -16268,7 +16352,7 @@
           <a:p>
             <a:fld id="{02E0CC3F-E257-4F6E-9E6A-B96D887699EC}" type="datetime1">
               <a:rPr lang="en-US" smtClean="0"/>
-              <a:t>3/24/2026</a:t>
+              <a:t>3/25/2026</a:t>
             </a:fld>
             <a:endParaRPr lang="en-US"/>
           </a:p>
@@ -16968,7 +17052,7 @@
           <a:p>
             <a:fld id="{BBFD9073-9E84-4C56-B5C8-FA6026186803}" type="datetime1">
               <a:rPr lang="en-US" smtClean="0"/>
-              <a:t>3/24/2026</a:t>
+              <a:t>3/25/2026</a:t>
             </a:fld>
             <a:endParaRPr lang="en-US"/>
           </a:p>
@@ -17303,7 +17387,7 @@
           <a:p>
             <a:fld id="{7FD71008-F1A2-4E65-9AFD-4970D8007661}" type="datetime1">
               <a:rPr lang="en-US" smtClean="0"/>
-              <a:t>3/24/2026</a:t>
+              <a:t>3/25/2026</a:t>
             </a:fld>
             <a:endParaRPr lang="en-US"/>
           </a:p>
@@ -17976,7 +18060,7 @@
           <a:p>
             <a:fld id="{35CFC7E7-57B7-4617-A947-41F006E88028}" type="datetime1">
               <a:rPr lang="en-US" smtClean="0"/>
-              <a:t>3/24/2026</a:t>
+              <a:t>3/25/2026</a:t>
             </a:fld>
             <a:endParaRPr lang="en-US"/>
           </a:p>
@@ -18747,7 +18831,7 @@
           <a:p>
             <a:fld id="{80BDAA3E-BE52-42BC-99E8-CCCB81A57ABD}" type="datetime1">
               <a:rPr lang="en-US" smtClean="0"/>
-              <a:t>3/24/2026</a:t>
+              <a:t>3/25/2026</a:t>
             </a:fld>
             <a:endParaRPr lang="en-US"/>
           </a:p>
@@ -19295,7 +19379,7 @@
           <a:p>
             <a:fld id="{BCA7961A-B010-49E0-A3F6-1ED7ACF29013}" type="datetime1">
               <a:rPr lang="en-US" smtClean="0"/>
-              <a:t>3/24/2026</a:t>
+              <a:t>3/25/2026</a:t>
             </a:fld>
             <a:endParaRPr lang="en-US"/>
           </a:p>
@@ -19704,7 +19788,7 @@
           <a:p>
             <a:fld id="{54A4A468-500F-41B2-B72F-78A325FCC0DA}" type="datetime1">
               <a:rPr lang="en-US" smtClean="0"/>
-              <a:t>3/24/2026</a:t>
+              <a:t>3/25/2026</a:t>
             </a:fld>
             <a:endParaRPr lang="en-US"/>
           </a:p>
@@ -20173,7 +20257,7 @@
           <a:p>
             <a:fld id="{7DA2CEDE-2AB4-4FB8-9551-E0AA4222B1A3}" type="datetime1">
               <a:rPr lang="en-US" smtClean="0"/>
-              <a:t>3/24/2026</a:t>
+              <a:t>3/25/2026</a:t>
             </a:fld>
             <a:endParaRPr lang="en-US"/>
           </a:p>
@@ -20453,7 +20537,7 @@
           <a:p>
             <a:fld id="{1B1491A9-BF26-4517-AB22-6183D453A902}" type="datetime1">
               <a:rPr lang="en-US" smtClean="0"/>
-              <a:t>3/24/2026</a:t>
+              <a:t>3/25/2026</a:t>
             </a:fld>
             <a:endParaRPr lang="en-US"/>
           </a:p>
@@ -21011,7 +21095,7 @@
           <a:p>
             <a:fld id="{3A5024DF-23AF-419A-978A-28215FBF1E37}" type="datetime1">
               <a:rPr lang="en-US" smtClean="0"/>
-              <a:t>3/24/2026</a:t>
+              <a:t>3/25/2026</a:t>
             </a:fld>
             <a:endParaRPr lang="en-US"/>
           </a:p>
@@ -21255,7 +21339,7 @@
           <a:p>
             <a:fld id="{9CF24436-170D-487D-ADBB-C24D74D1C150}" type="datetime1">
               <a:rPr lang="en-US" smtClean="0"/>
-              <a:t>3/24/2026</a:t>
+              <a:t>3/25/2026</a:t>
             </a:fld>
             <a:endParaRPr lang="en-US"/>
           </a:p>
@@ -21621,7 +21705,7 @@
           <a:p>
             <a:fld id="{7B01CFC0-D171-4F9D-A610-2F47C1080058}" type="datetime1">
               <a:rPr lang="en-US" smtClean="0"/>
-              <a:t>3/24/2026</a:t>
+              <a:t>3/25/2026</a:t>
             </a:fld>
             <a:endParaRPr lang="en-US"/>
           </a:p>
@@ -22013,7 +22097,7 @@
           <a:p>
             <a:fld id="{7DA2CEDE-2AB4-4FB8-9551-E0AA4222B1A3}" type="datetime1">
               <a:rPr lang="en-US" smtClean="0"/>
-              <a:t>3/24/2026</a:t>
+              <a:t>3/25/2026</a:t>
             </a:fld>
             <a:endParaRPr lang="en-US"/>
           </a:p>
@@ -22550,7 +22634,7 @@
           <a:p>
             <a:fld id="{16C42483-B3E3-4399-B6B2-4B1D067F8CE5}" type="datetime1">
               <a:rPr lang="en-US" smtClean="0"/>
-              <a:t>3/24/2026</a:t>
+              <a:t>3/25/2026</a:t>
             </a:fld>
             <a:endParaRPr lang="en-US"/>
           </a:p>
@@ -22666,7 +22750,7 @@
           <a:p>
             <a:fld id="{9A36574F-2CAD-411B-9EF3-12D0DF2C09EB}" type="datetime1">
               <a:rPr lang="en-US" smtClean="0"/>
-              <a:t>3/24/2026</a:t>
+              <a:t>3/25/2026</a:t>
             </a:fld>
             <a:endParaRPr lang="en-US"/>
           </a:p>
@@ -22821,7 +22905,7 @@
           <a:p>
             <a:fld id="{5B5223AD-184F-4273-AC4F-854D3B259B85}" type="datetime1">
               <a:rPr lang="en-US" smtClean="0"/>
-              <a:t>3/24/2026</a:t>
+              <a:t>3/25/2026</a:t>
             </a:fld>
             <a:endParaRPr lang="en-US"/>
           </a:p>
@@ -23577,7 +23661,7 @@
           <a:p>
             <a:fld id="{9458DF63-6CB9-404F-8464-DF813E7A7B12}" type="datetime1">
               <a:rPr lang="en-US" smtClean="0"/>
-              <a:t>3/24/2026</a:t>
+              <a:t>3/25/2026</a:t>
             </a:fld>
             <a:endParaRPr lang="en-US"/>
           </a:p>
@@ -23816,7 +23900,7 @@
           <a:p>
             <a:fld id="{907E4E07-E412-47A0-AB1E-CAAABECD1A31}" type="datetime1">
               <a:rPr lang="en-US" smtClean="0"/>
-              <a:t>3/24/2026</a:t>
+              <a:t>3/25/2026</a:t>
             </a:fld>
             <a:endParaRPr lang="en-US"/>
           </a:p>
@@ -24316,7 +24400,7 @@
           <a:p>
             <a:fld id="{21560963-1EEA-4BDE-8FF9-3FEE13B5D43C}" type="datetime1">
               <a:rPr lang="en-US" smtClean="0"/>
-              <a:t>3/24/2026</a:t>
+              <a:t>3/25/2026</a:t>
             </a:fld>
             <a:endParaRPr lang="en-US"/>
           </a:p>
@@ -24810,7 +24894,7 @@
           <a:p>
             <a:fld id="{082FB242-E4A2-4711-B168-6D02C45DBE61}" type="datetime1">
               <a:rPr lang="en-US" smtClean="0"/>
-              <a:t>3/24/2026</a:t>
+              <a:t>3/25/2026</a:t>
             </a:fld>
             <a:endParaRPr lang="en-US"/>
           </a:p>
@@ -25048,7 +25132,7 @@
           <a:p>
             <a:fld id="{7DA2CEDE-2AB4-4FB8-9551-E0AA4222B1A3}" type="datetime1">
               <a:rPr lang="en-US" smtClean="0"/>
-              <a:t>3/24/2026</a:t>
+              <a:t>3/25/2026</a:t>
             </a:fld>
             <a:endParaRPr lang="en-US"/>
           </a:p>
@@ -25370,7 +25454,7 @@
             <a:fld id="{7DA2CEDE-2AB4-4FB8-9551-E0AA4222B1A3}" type="datetime1">
               <a:rPr lang="en-US" smtClean="0"/>
               <a:pPr/>
-              <a:t>3/24/2026</a:t>
+              <a:t>3/25/2026</a:t>
             </a:fld>
             <a:endParaRPr lang="en-US"/>
           </a:p>
@@ -26140,27 +26224,94 @@
       </p:sp>
       <p:sp>
         <p:nvSpPr>
-          <p:cNvPr id="5" name="Picture Placeholder 4">
-            <a:extLst>
-              <a:ext uri="{FF2B5EF4-FFF2-40B4-BE49-F238E27FC236}">
-                <a16:creationId xmlns:a16="http://schemas.microsoft.com/office/drawing/2014/main" id="{7E4E342A-1C68-2FBA-64D6-98F5A36AC9F2}"/>
-              </a:ext>
-            </a:extLst>
-          </p:cNvPr>
-          <p:cNvSpPr>
-            <a:spLocks noGrp="1"/>
-          </p:cNvSpPr>
-          <p:nvPr>
-            <p:ph type="pic" sz="quarter" idx="13"/>
-          </p:nvPr>
+          <p:cNvPr id="9" name="Rectangle 8">
+            <a:extLst>
+              <a:ext uri="{FF2B5EF4-FFF2-40B4-BE49-F238E27FC236}">
+                <a16:creationId xmlns:a16="http://schemas.microsoft.com/office/drawing/2014/main" id="{6645FFEA-C216-5F93-7435-6A491407EBBC}"/>
+              </a:ext>
+            </a:extLst>
+          </p:cNvPr>
+          <p:cNvSpPr/>
+          <p:nvPr/>
         </p:nvSpPr>
         <p:spPr>
           <a:xfrm>
-            <a:off x="2030" y="-1"/>
-            <a:ext cx="12192001" cy="6858000"/>
-          </a:xfrm>
-        </p:spPr>
-      </p:sp>
+            <a:off x="3758184" y="3922776"/>
+            <a:ext cx="3675888" cy="777240"/>
+          </a:xfrm>
+          <a:prstGeom prst="rect">
+            <a:avLst/>
+          </a:prstGeom>
+          <a:solidFill>
+            <a:schemeClr val="tx1"/>
+          </a:solidFill>
+          <a:ln>
+            <a:solidFill>
+              <a:schemeClr val="tx1"/>
+            </a:solidFill>
+          </a:ln>
+        </p:spPr>
+        <p:style>
+          <a:lnRef idx="2">
+            <a:schemeClr val="accent1">
+              <a:shade val="15000"/>
+            </a:schemeClr>
+          </a:lnRef>
+          <a:fillRef idx="1">
+            <a:schemeClr val="accent1"/>
+          </a:fillRef>
+          <a:effectRef idx="0">
+            <a:schemeClr val="accent1"/>
+          </a:effectRef>
+          <a:fontRef idx="minor">
+            <a:schemeClr val="lt1"/>
+          </a:fontRef>
+        </p:style>
+        <p:txBody>
+          <a:bodyPr rtlCol="0" anchor="ctr"/>
+          <a:lstStyle/>
+          <a:p>
+            <a:pPr algn="ctr"/>
+            <a:endParaRPr lang="en-US"/>
+          </a:p>
+        </p:txBody>
+      </p:sp>
+      <p:pic>
+        <p:nvPicPr>
+          <p:cNvPr id="8" name="Picture 7">
+            <a:extLst>
+              <a:ext uri="{FF2B5EF4-FFF2-40B4-BE49-F238E27FC236}">
+                <a16:creationId xmlns:a16="http://schemas.microsoft.com/office/drawing/2014/main" id="{D0A0AEEB-472E-6D40-5720-441D36C78651}"/>
+              </a:ext>
+            </a:extLst>
+          </p:cNvPr>
+          <p:cNvPicPr>
+            <a:picLocks noChangeAspect="1"/>
+          </p:cNvPicPr>
+          <p:nvPr/>
+        </p:nvPicPr>
+        <p:blipFill>
+          <a:blip r:embed="rId2">
+            <a:extLst>
+              <a:ext uri="{28A0092B-C50C-407E-A947-70E740481C1C}">
+                <a14:useLocalDpi xmlns:a14="http://schemas.microsoft.com/office/drawing/2010/main" val="0"/>
+              </a:ext>
+            </a:extLst>
+          </a:blip>
+          <a:stretch>
+            <a:fillRect/>
+          </a:stretch>
+        </p:blipFill>
+        <p:spPr>
+          <a:xfrm>
+            <a:off x="2752915" y="1346772"/>
+            <a:ext cx="5686425" cy="3981450"/>
+          </a:xfrm>
+          <a:prstGeom prst="rect">
+            <a:avLst/>
+          </a:prstGeom>
+        </p:spPr>
+      </p:pic>
     </p:spTree>
     <p:extLst>
       <p:ext uri="{BB962C8B-B14F-4D97-AF65-F5344CB8AC3E}">
@@ -26251,7 +26402,7 @@
           <a:p>
             <a:fld id="{80EE6BAA-0080-49BB-A5F6-D96B22DFE410}" type="datetime1">
               <a:rPr lang="en-US" smtClean="0"/>
-              <a:t>3/24/2026</a:t>
+              <a:t>3/25/2026</a:t>
             </a:fld>
             <a:endParaRPr lang="en-US"/>
           </a:p>
@@ -26438,7 +26589,7 @@
           <a:p>
             <a:fld id="{80EE6BAA-0080-49BB-A5F6-D96B22DFE410}" type="datetime1">
               <a:rPr lang="en-US" smtClean="0"/>
-              <a:t>3/24/2026</a:t>
+              <a:t>3/25/2026</a:t>
             </a:fld>
             <a:endParaRPr lang="en-US"/>
           </a:p>
@@ -26639,7 +26790,7 @@
           <a:p>
             <a:fld id="{80EE6BAA-0080-49BB-A5F6-D96B22DFE410}" type="datetime1">
               <a:rPr lang="en-US" smtClean="0"/>
-              <a:t>3/24/2026</a:t>
+              <a:t>3/25/2026</a:t>
             </a:fld>
             <a:endParaRPr lang="en-US"/>
           </a:p>
@@ -26837,7 +26988,7 @@
           <a:p>
             <a:fld id="{80EE6BAA-0080-49BB-A5F6-D96B22DFE410}" type="datetime1">
               <a:rPr lang="en-US" smtClean="0"/>
-              <a:t>3/24/2026</a:t>
+              <a:t>3/25/2026</a:t>
             </a:fld>
             <a:endParaRPr lang="en-US"/>
           </a:p>
@@ -26926,36 +27077,6 @@
           <p:nvPr>
             <p:ph sz="quarter" idx="13"/>
           </p:nvPr>
-        </p:nvPicPr>
-        <p:blipFill>
-          <a:blip r:embed="rId2"/>
-          <a:stretch>
-            <a:fillRect/>
-          </a:stretch>
-        </p:blipFill>
-        <p:spPr>
-          <a:xfrm>
-            <a:off x="3178176" y="2053434"/>
-            <a:ext cx="2685225" cy="2666791"/>
-          </a:xfrm>
-          <a:prstGeom prst="rect">
-            <a:avLst/>
-          </a:prstGeom>
-        </p:spPr>
-      </p:pic>
-      <p:pic>
-        <p:nvPicPr>
-          <p:cNvPr id="8" name="Picture 7" descr="A child with a yellow lanyard&#10;&#10;AI-generated content may be incorrect.">
-            <a:extLst>
-              <a:ext uri="{FF2B5EF4-FFF2-40B4-BE49-F238E27FC236}">
-                <a16:creationId xmlns:a16="http://schemas.microsoft.com/office/drawing/2014/main" id="{467C0DCF-CAE5-8FDB-1CF3-7B633EEA50E3}"/>
-              </a:ext>
-            </a:extLst>
-          </p:cNvPr>
-          <p:cNvPicPr>
-            <a:picLocks noChangeAspect="1"/>
-          </p:cNvPicPr>
-          <p:nvPr/>
         </p:nvPicPr>
         <p:blipFill>
           <a:blip r:embed="rId3"/>
@@ -26965,8 +27086,8 @@
         </p:blipFill>
         <p:spPr>
           <a:xfrm>
-            <a:off x="9075172" y="2061053"/>
-            <a:ext cx="2705492" cy="2652387"/>
+            <a:off x="3178176" y="2053434"/>
+            <a:ext cx="2685225" cy="2666791"/>
           </a:xfrm>
           <a:prstGeom prst="rect">
             <a:avLst/>
@@ -26975,10 +27096,10 @@
       </p:pic>
       <p:pic>
         <p:nvPicPr>
-          <p:cNvPr id="9" name="Picture 8" descr="A child in a blue shirt&#10;&#10;AI-generated content may be incorrect.">
-            <a:extLst>
-              <a:ext uri="{FF2B5EF4-FFF2-40B4-BE49-F238E27FC236}">
-                <a16:creationId xmlns:a16="http://schemas.microsoft.com/office/drawing/2014/main" id="{5EC17037-C1ED-3F7F-AA90-5DCFB61934F5}"/>
+          <p:cNvPr id="8" name="Picture 7" descr="A child with a yellow lanyard&#10;&#10;AI-generated content may be incorrect.">
+            <a:extLst>
+              <a:ext uri="{FF2B5EF4-FFF2-40B4-BE49-F238E27FC236}">
+                <a16:creationId xmlns:a16="http://schemas.microsoft.com/office/drawing/2014/main" id="{467C0DCF-CAE5-8FDB-1CF3-7B633EEA50E3}"/>
               </a:ext>
             </a:extLst>
           </p:cNvPr>
@@ -26995,8 +27116,8 @@
         </p:blipFill>
         <p:spPr>
           <a:xfrm>
-            <a:off x="6101154" y="2057204"/>
-            <a:ext cx="2693227" cy="2660085"/>
+            <a:off x="9075172" y="2061053"/>
+            <a:ext cx="2705492" cy="2652387"/>
           </a:xfrm>
           <a:prstGeom prst="rect">
             <a:avLst/>
@@ -27005,10 +27126,10 @@
       </p:pic>
       <p:pic>
         <p:nvPicPr>
-          <p:cNvPr id="10" name="Picture 9" descr="A child with a white shirt and green lanyard&#10;&#10;AI-generated content may be incorrect.">
-            <a:extLst>
-              <a:ext uri="{FF2B5EF4-FFF2-40B4-BE49-F238E27FC236}">
-                <a16:creationId xmlns:a16="http://schemas.microsoft.com/office/drawing/2014/main" id="{8344D972-1A05-37A6-DD46-DA0E388784E0}"/>
+          <p:cNvPr id="9" name="Picture 8" descr="A child in a blue shirt&#10;&#10;AI-generated content may be incorrect.">
+            <a:extLst>
+              <a:ext uri="{FF2B5EF4-FFF2-40B4-BE49-F238E27FC236}">
+                <a16:creationId xmlns:a16="http://schemas.microsoft.com/office/drawing/2014/main" id="{5EC17037-C1ED-3F7F-AA90-5DCFB61934F5}"/>
               </a:ext>
             </a:extLst>
           </p:cNvPr>
@@ -27019,6 +27140,36 @@
         </p:nvPicPr>
         <p:blipFill>
           <a:blip r:embed="rId5"/>
+          <a:stretch>
+            <a:fillRect/>
+          </a:stretch>
+        </p:blipFill>
+        <p:spPr>
+          <a:xfrm>
+            <a:off x="6101154" y="2057204"/>
+            <a:ext cx="2693227" cy="2660085"/>
+          </a:xfrm>
+          <a:prstGeom prst="rect">
+            <a:avLst/>
+          </a:prstGeom>
+        </p:spPr>
+      </p:pic>
+      <p:pic>
+        <p:nvPicPr>
+          <p:cNvPr id="10" name="Picture 9" descr="A child with a white shirt and green lanyard&#10;&#10;AI-generated content may be incorrect.">
+            <a:extLst>
+              <a:ext uri="{FF2B5EF4-FFF2-40B4-BE49-F238E27FC236}">
+                <a16:creationId xmlns:a16="http://schemas.microsoft.com/office/drawing/2014/main" id="{8344D972-1A05-37A6-DD46-DA0E388784E0}"/>
+              </a:ext>
+            </a:extLst>
+          </p:cNvPr>
+          <p:cNvPicPr>
+            <a:picLocks noChangeAspect="1"/>
+          </p:cNvPicPr>
+          <p:nvPr/>
+        </p:nvPicPr>
+        <p:blipFill>
+          <a:blip r:embed="rId6"/>
           <a:stretch>
             <a:fillRect/>
           </a:stretch>
@@ -27123,7 +27274,7 @@
           <a:p>
             <a:fld id="{80EE6BAA-0080-49BB-A5F6-D96B22DFE410}" type="datetime1">
               <a:rPr lang="en-US" smtClean="0"/>
-              <a:t>3/24/2026</a:t>
+              <a:t>3/25/2026</a:t>
             </a:fld>
             <a:endParaRPr lang="en-US"/>
           </a:p>
@@ -27517,7 +27668,7 @@
           <a:p>
             <a:fld id="{21560963-1EEA-4BDE-8FF9-3FEE13B5D43C}" type="datetime1">
               <a:rPr lang="en-US" smtClean="0"/>
-              <a:t>3/24/2026</a:t>
+              <a:t>3/25/2026</a:t>
             </a:fld>
             <a:endParaRPr lang="en-US"/>
           </a:p>
@@ -28425,6 +28576,35 @@
 </file>
 
 <file path=customXml/item1.xml><?xml version="1.0" encoding="utf-8"?>
+<p:properties xmlns:p="http://schemas.microsoft.com/office/2006/metadata/properties" xmlns:xsi="http://www.w3.org/2001/XMLSchema-instance" xmlns:pc="http://schemas.microsoft.com/office/infopath/2007/PartnerControls">
+  <documentManagement>
+    <_ip_UnifiedCompliancePolicyUIAction xmlns="http://schemas.microsoft.com/sharepoint/v3" xsi:nil="true"/>
+    <_ip_UnifiedCompliancePolicyProperties xmlns="http://schemas.microsoft.com/sharepoint/v3" xsi:nil="true"/>
+    <TaxCatchAll xmlns="230e9df3-be65-4c73-a93b-d1236ebd677e" xsi:nil="true"/>
+    <Image xmlns="71af3243-3dd4-4a8d-8c0d-dd76da1f02a5">
+      <Url xsi:nil="true"/>
+      <Description xsi:nil="true"/>
+    </Image>
+    <Status xmlns="71af3243-3dd4-4a8d-8c0d-dd76da1f02a5">Not started</Status>
+    <Background xmlns="71af3243-3dd4-4a8d-8c0d-dd76da1f02a5">false</Background>
+    <ImageTagsTaxHTField xmlns="71af3243-3dd4-4a8d-8c0d-dd76da1f02a5">
+      <Terms xmlns="http://schemas.microsoft.com/office/infopath/2007/PartnerControls"/>
+    </ImageTagsTaxHTField>
+    <MediaServiceKeyPoints xmlns="71af3243-3dd4-4a8d-8c0d-dd76da1f02a5" xsi:nil="true"/>
+  </documentManagement>
+</p:properties>
+</file>
+
+<file path=customXml/item2.xml><?xml version="1.0" encoding="utf-8"?>
+<?mso-contentType ?>
+<FormTemplates xmlns="http://schemas.microsoft.com/sharepoint/v3/contenttype/forms">
+  <Display>DocumentLibraryForm</Display>
+  <Edit>DocumentLibraryForm</Edit>
+  <New>DocumentLibraryForm</New>
+</FormTemplates>
+</file>
+
+<file path=customXml/item3.xml><?xml version="1.0" encoding="utf-8"?>
 <ct:contentTypeSchema xmlns:ct="http://schemas.microsoft.com/office/2006/metadata/contentType" xmlns:ma="http://schemas.microsoft.com/office/2006/metadata/properties/metaAttributes" ct:_="" ma:_="" ma:contentTypeName="Document" ma:contentTypeID="0x01010079F111ED35F8CC479449609E8A0923A6" ma:contentTypeVersion="30" ma:contentTypeDescription="Create a new document." ma:contentTypeScope="" ma:versionID="cec0622158e8f13124e9e8fd4de31bd1">
   <xsd:schema xmlns:xsd="http://www.w3.org/2001/XMLSchema" xmlns:xs="http://www.w3.org/2001/XMLSchema" xmlns:p="http://schemas.microsoft.com/office/2006/metadata/properties" xmlns:ns1="http://schemas.microsoft.com/sharepoint/v3" xmlns:ns2="71af3243-3dd4-4a8d-8c0d-dd76da1f02a5" xmlns:ns3="16c05727-aa75-4e4a-9b5f-8a80a1165891" xmlns:ns4="230e9df3-be65-4c73-a93b-d1236ebd677e" targetNamespace="http://schemas.microsoft.com/office/2006/metadata/properties" ma:root="true" ma:fieldsID="3b52f30ab005d15df08657af532e6e38" ns1:_="" ns2:_="" ns3:_="" ns4:_="">
     <xsd:import namespace="http://schemas.microsoft.com/sharepoint/v3"/>
@@ -28742,36 +28922,34 @@
 </ct:contentTypeSchema>
 </file>
 
-<file path=customXml/item2.xml><?xml version="1.0" encoding="utf-8"?>
-<?mso-contentType ?>
-<FormTemplates xmlns="http://schemas.microsoft.com/sharepoint/v3/contenttype/forms">
-  <Display>DocumentLibraryForm</Display>
-  <Edit>DocumentLibraryForm</Edit>
-  <New>DocumentLibraryForm</New>
-</FormTemplates>
+<file path=customXml/itemProps1.xml><?xml version="1.0" encoding="utf-8"?>
+<ds:datastoreItem xmlns:ds="http://schemas.openxmlformats.org/officeDocument/2006/customXml" ds:itemID="{DCDFE19F-3BE8-48B3-9B35-A01B9C3497A7}">
+  <ds:schemaRefs>
+    <ds:schemaRef ds:uri="16c05727-aa75-4e4a-9b5f-8a80a1165891"/>
+    <ds:schemaRef ds:uri="230e9df3-be65-4c73-a93b-d1236ebd677e"/>
+    <ds:schemaRef ds:uri="71af3243-3dd4-4a8d-8c0d-dd76da1f02a5"/>
+    <ds:schemaRef ds:uri="http://purl.org/dc/dcmitype/"/>
+    <ds:schemaRef ds:uri="http://purl.org/dc/elements/1.1/"/>
+    <ds:schemaRef ds:uri="http://purl.org/dc/terms/"/>
+    <ds:schemaRef ds:uri="http://schemas.microsoft.com/office/2006/documentManagement/types"/>
+    <ds:schemaRef ds:uri="http://schemas.microsoft.com/office/2006/metadata/properties"/>
+    <ds:schemaRef ds:uri="http://schemas.microsoft.com/office/infopath/2007/PartnerControls"/>
+    <ds:schemaRef ds:uri="http://schemas.microsoft.com/sharepoint/v3"/>
+    <ds:schemaRef ds:uri="http://schemas.openxmlformats.org/package/2006/metadata/core-properties"/>
+    <ds:schemaRef ds:uri="http://www.w3.org/XML/1998/namespace"/>
+  </ds:schemaRefs>
+</ds:datastoreItem>
 </file>
 
-<file path=customXml/item3.xml><?xml version="1.0" encoding="utf-8"?>
-<p:properties xmlns:p="http://schemas.microsoft.com/office/2006/metadata/properties" xmlns:xsi="http://www.w3.org/2001/XMLSchema-instance" xmlns:pc="http://schemas.microsoft.com/office/infopath/2007/PartnerControls">
-  <documentManagement>
-    <_ip_UnifiedCompliancePolicyUIAction xmlns="http://schemas.microsoft.com/sharepoint/v3" xsi:nil="true"/>
-    <_ip_UnifiedCompliancePolicyProperties xmlns="http://schemas.microsoft.com/sharepoint/v3" xsi:nil="true"/>
-    <TaxCatchAll xmlns="230e9df3-be65-4c73-a93b-d1236ebd677e" xsi:nil="true"/>
-    <Image xmlns="71af3243-3dd4-4a8d-8c0d-dd76da1f02a5">
-      <Url xsi:nil="true"/>
-      <Description xsi:nil="true"/>
-    </Image>
-    <Status xmlns="71af3243-3dd4-4a8d-8c0d-dd76da1f02a5">Not started</Status>
-    <Background xmlns="71af3243-3dd4-4a8d-8c0d-dd76da1f02a5">false</Background>
-    <ImageTagsTaxHTField xmlns="71af3243-3dd4-4a8d-8c0d-dd76da1f02a5">
-      <Terms xmlns="http://schemas.microsoft.com/office/infopath/2007/PartnerControls"/>
-    </ImageTagsTaxHTField>
-    <MediaServiceKeyPoints xmlns="71af3243-3dd4-4a8d-8c0d-dd76da1f02a5" xsi:nil="true"/>
-  </documentManagement>
-</p:properties>
+<file path=customXml/itemProps2.xml><?xml version="1.0" encoding="utf-8"?>
+<ds:datastoreItem xmlns:ds="http://schemas.openxmlformats.org/officeDocument/2006/customXml" ds:itemID="{83888480-CF61-459A-B049-2565BF1B6C26}">
+  <ds:schemaRefs>
+    <ds:schemaRef ds:uri="http://schemas.microsoft.com/sharepoint/v3/contenttype/forms"/>
+  </ds:schemaRefs>
+</ds:datastoreItem>
 </file>
 
-<file path=customXml/itemProps1.xml><?xml version="1.0" encoding="utf-8"?>
+<file path=customXml/itemProps3.xml><?xml version="1.0" encoding="utf-8"?>
 <ds:datastoreItem xmlns:ds="http://schemas.openxmlformats.org/officeDocument/2006/customXml" ds:itemID="{5C2D0E46-786A-45D3-8CE5-638765D8BA3B}">
   <ds:schemaRefs>
     <ds:schemaRef ds:uri="16c05727-aa75-4e4a-9b5f-8a80a1165891"/>
@@ -28792,33 +28970,6 @@
 </ds:datastoreItem>
 </file>
 
-<file path=customXml/itemProps2.xml><?xml version="1.0" encoding="utf-8"?>
-<ds:datastoreItem xmlns:ds="http://schemas.openxmlformats.org/officeDocument/2006/customXml" ds:itemID="{83888480-CF61-459A-B049-2565BF1B6C26}">
-  <ds:schemaRefs>
-    <ds:schemaRef ds:uri="http://schemas.microsoft.com/sharepoint/v3/contenttype/forms"/>
-  </ds:schemaRefs>
-</ds:datastoreItem>
-</file>
-
-<file path=customXml/itemProps3.xml><?xml version="1.0" encoding="utf-8"?>
-<ds:datastoreItem xmlns:ds="http://schemas.openxmlformats.org/officeDocument/2006/customXml" ds:itemID="{DCDFE19F-3BE8-48B3-9B35-A01B9C3497A7}">
-  <ds:schemaRefs>
-    <ds:schemaRef ds:uri="16c05727-aa75-4e4a-9b5f-8a80a1165891"/>
-    <ds:schemaRef ds:uri="230e9df3-be65-4c73-a93b-d1236ebd677e"/>
-    <ds:schemaRef ds:uri="71af3243-3dd4-4a8d-8c0d-dd76da1f02a5"/>
-    <ds:schemaRef ds:uri="http://purl.org/dc/dcmitype/"/>
-    <ds:schemaRef ds:uri="http://purl.org/dc/elements/1.1/"/>
-    <ds:schemaRef ds:uri="http://purl.org/dc/terms/"/>
-    <ds:schemaRef ds:uri="http://schemas.microsoft.com/office/2006/documentManagement/types"/>
-    <ds:schemaRef ds:uri="http://schemas.microsoft.com/office/2006/metadata/properties"/>
-    <ds:schemaRef ds:uri="http://schemas.microsoft.com/office/infopath/2007/PartnerControls"/>
-    <ds:schemaRef ds:uri="http://schemas.microsoft.com/sharepoint/v3"/>
-    <ds:schemaRef ds:uri="http://schemas.openxmlformats.org/package/2006/metadata/core-properties"/>
-    <ds:schemaRef ds:uri="http://www.w3.org/XML/1998/namespace"/>
-  </ds:schemaRefs>
-</ds:datastoreItem>
-</file>
-
 <file path=docMetadata/LabelInfo.xml><?xml version="1.0" encoding="utf-8"?>
 <clbl:labelList xmlns:clbl="http://schemas.microsoft.com/office/2020/mipLabelMetadata"/>
 </file>